--- a/docs/Airmius_Ads_System_Praesentation.pptx
+++ b/docs/Airmius_Ads_System_Praesentation.pptx
@@ -2,7 +2,7 @@
 <file path=ppt/presentation.xml><?xml version="1.0" encoding="utf-8"?>
 <p:presentation xmlns:a="http://schemas.openxmlformats.org/drawingml/2006/main" xmlns:r="http://schemas.openxmlformats.org/officeDocument/2006/relationships" xmlns:p="http://schemas.openxmlformats.org/presentationml/2006/main" saveSubsetFonts="1">
   <p:sldMasterIdLst>
-    <p:sldMasterId id="2147483648" r:id="rId1"/>
+    <p:sldMasterId id="2147483660" r:id="rId1"/>
   </p:sldMasterIdLst>
   <p:sldIdLst>
     <p:sldId id="256" r:id="rId2"/>
@@ -32,9 +32,9 @@
   <p:notesSz cx="6858000" cy="9144000"/>
   <p:defaultTextStyle>
     <a:defPPr>
-      <a:defRPr lang="de-DE"/>
+      <a:defRPr lang="en-US"/>
     </a:defPPr>
-    <a:lvl1pPr marL="0" algn="l" defTabSz="914400" rtl="0" eaLnBrk="1" latinLnBrk="0" hangingPunct="1">
+    <a:lvl1pPr marL="0" algn="l" defTabSz="457200" rtl="0" eaLnBrk="1" latinLnBrk="0" hangingPunct="1">
       <a:defRPr sz="1800" kern="1200">
         <a:solidFill>
           <a:schemeClr val="tx1"/>
@@ -44,7 +44,7 @@
         <a:cs typeface="+mn-cs"/>
       </a:defRPr>
     </a:lvl1pPr>
-    <a:lvl2pPr marL="457200" algn="l" defTabSz="914400" rtl="0" eaLnBrk="1" latinLnBrk="0" hangingPunct="1">
+    <a:lvl2pPr marL="457200" algn="l" defTabSz="457200" rtl="0" eaLnBrk="1" latinLnBrk="0" hangingPunct="1">
       <a:defRPr sz="1800" kern="1200">
         <a:solidFill>
           <a:schemeClr val="tx1"/>
@@ -54,7 +54,7 @@
         <a:cs typeface="+mn-cs"/>
       </a:defRPr>
     </a:lvl2pPr>
-    <a:lvl3pPr marL="914400" algn="l" defTabSz="914400" rtl="0" eaLnBrk="1" latinLnBrk="0" hangingPunct="1">
+    <a:lvl3pPr marL="914400" algn="l" defTabSz="457200" rtl="0" eaLnBrk="1" latinLnBrk="0" hangingPunct="1">
       <a:defRPr sz="1800" kern="1200">
         <a:solidFill>
           <a:schemeClr val="tx1"/>
@@ -64,7 +64,7 @@
         <a:cs typeface="+mn-cs"/>
       </a:defRPr>
     </a:lvl3pPr>
-    <a:lvl4pPr marL="1371600" algn="l" defTabSz="914400" rtl="0" eaLnBrk="1" latinLnBrk="0" hangingPunct="1">
+    <a:lvl4pPr marL="1371600" algn="l" defTabSz="457200" rtl="0" eaLnBrk="1" latinLnBrk="0" hangingPunct="1">
       <a:defRPr sz="1800" kern="1200">
         <a:solidFill>
           <a:schemeClr val="tx1"/>
@@ -74,7 +74,7 @@
         <a:cs typeface="+mn-cs"/>
       </a:defRPr>
     </a:lvl4pPr>
-    <a:lvl5pPr marL="1828800" algn="l" defTabSz="914400" rtl="0" eaLnBrk="1" latinLnBrk="0" hangingPunct="1">
+    <a:lvl5pPr marL="1828800" algn="l" defTabSz="457200" rtl="0" eaLnBrk="1" latinLnBrk="0" hangingPunct="1">
       <a:defRPr sz="1800" kern="1200">
         <a:solidFill>
           <a:schemeClr val="tx1"/>
@@ -84,7 +84,7 @@
         <a:cs typeface="+mn-cs"/>
       </a:defRPr>
     </a:lvl5pPr>
-    <a:lvl6pPr marL="2286000" algn="l" defTabSz="914400" rtl="0" eaLnBrk="1" latinLnBrk="0" hangingPunct="1">
+    <a:lvl6pPr marL="2286000" algn="l" defTabSz="457200" rtl="0" eaLnBrk="1" latinLnBrk="0" hangingPunct="1">
       <a:defRPr sz="1800" kern="1200">
         <a:solidFill>
           <a:schemeClr val="tx1"/>
@@ -94,7 +94,7 @@
         <a:cs typeface="+mn-cs"/>
       </a:defRPr>
     </a:lvl6pPr>
-    <a:lvl7pPr marL="2743200" algn="l" defTabSz="914400" rtl="0" eaLnBrk="1" latinLnBrk="0" hangingPunct="1">
+    <a:lvl7pPr marL="2743200" algn="l" defTabSz="457200" rtl="0" eaLnBrk="1" latinLnBrk="0" hangingPunct="1">
       <a:defRPr sz="1800" kern="1200">
         <a:solidFill>
           <a:schemeClr val="tx1"/>
@@ -104,7 +104,7 @@
         <a:cs typeface="+mn-cs"/>
       </a:defRPr>
     </a:lvl7pPr>
-    <a:lvl8pPr marL="3200400" algn="l" defTabSz="914400" rtl="0" eaLnBrk="1" latinLnBrk="0" hangingPunct="1">
+    <a:lvl8pPr marL="3200400" algn="l" defTabSz="457200" rtl="0" eaLnBrk="1" latinLnBrk="0" hangingPunct="1">
       <a:defRPr sz="1800" kern="1200">
         <a:solidFill>
           <a:schemeClr val="tx1"/>
@@ -114,7 +114,7 @@
         <a:cs typeface="+mn-cs"/>
       </a:defRPr>
     </a:lvl8pPr>
-    <a:lvl9pPr marL="3657600" algn="l" defTabSz="914400" rtl="0" eaLnBrk="1" latinLnBrk="0" hangingPunct="1">
+    <a:lvl9pPr marL="3657600" algn="l" defTabSz="457200" rtl="0" eaLnBrk="1" latinLnBrk="0" hangingPunct="1">
       <a:defRPr sz="1800" kern="1200">
         <a:solidFill>
           <a:schemeClr val="tx1"/>
@@ -125,6 +125,11 @@
       </a:defRPr>
     </a:lvl9pPr>
   </p:defaultTextStyle>
+  <p:extLst>
+    <p:ext uri="{EFAFB233-063F-42B5-8137-9DF3F51BA10A}">
+      <p15:sldGuideLst xmlns:p15="http://schemas.microsoft.com/office/powerpoint/2012/main"/>
+    </p:ext>
+  </p:extLst>
 </p:presentation>
 </file>
 
@@ -147,7 +152,7 @@
       </p:grpSpPr>
       <p:sp>
         <p:nvSpPr>
-          <p:cNvPr id="2" name="Titel 1"/>
+          <p:cNvPr id="2" name="Title 1"/>
           <p:cNvSpPr>
             <a:spLocks noGrp="1"/>
           </p:cNvSpPr>
@@ -173,13 +178,13 @@
               <a:rPr lang="de-DE" smtClean="0"/>
               <a:t>Titelmasterformat durch Klicken bearbeiten</a:t>
             </a:r>
-            <a:endParaRPr lang="de-DE"/>
-          </a:p>
-        </p:txBody>
-      </p:sp>
-      <p:sp>
-        <p:nvSpPr>
-          <p:cNvPr id="3" name="Untertitel 2"/>
+            <a:endParaRPr lang="en-US" dirty="0"/>
+          </a:p>
+        </p:txBody>
+      </p:sp>
+      <p:sp>
+        <p:nvSpPr>
+          <p:cNvPr id="3" name="Subtitle 2"/>
           <p:cNvSpPr>
             <a:spLocks noGrp="1"/>
           </p:cNvSpPr>
@@ -238,13 +243,13 @@
               <a:rPr lang="de-DE" smtClean="0"/>
               <a:t>Formatvorlage des Untertitelmasters durch Klicken bearbeiten</a:t>
             </a:r>
-            <a:endParaRPr lang="de-DE"/>
-          </a:p>
-        </p:txBody>
-      </p:sp>
-      <p:sp>
-        <p:nvSpPr>
-          <p:cNvPr id="4" name="Datumsplatzhalter 3"/>
+            <a:endParaRPr lang="en-US" dirty="0"/>
+          </a:p>
+        </p:txBody>
+      </p:sp>
+      <p:sp>
+        <p:nvSpPr>
+          <p:cNvPr id="4" name="Date Placeholder 3"/>
           <p:cNvSpPr>
             <a:spLocks noGrp="1"/>
           </p:cNvSpPr>
@@ -267,7 +272,7 @@
       </p:sp>
       <p:sp>
         <p:nvSpPr>
-          <p:cNvPr id="5" name="Fußzeilenplatzhalter 4"/>
+          <p:cNvPr id="5" name="Footer Placeholder 4"/>
           <p:cNvSpPr>
             <a:spLocks noGrp="1"/>
           </p:cNvSpPr>
@@ -286,7 +291,7 @@
       </p:sp>
       <p:sp>
         <p:nvSpPr>
-          <p:cNvPr id="6" name="Foliennummernplatzhalter 5"/>
+          <p:cNvPr id="6" name="Slide Number Placeholder 5"/>
           <p:cNvSpPr>
             <a:spLocks noGrp="1"/>
           </p:cNvSpPr>
@@ -310,7 +315,7 @@
     </p:spTree>
     <p:extLst>
       <p:ext uri="{BB962C8B-B14F-4D97-AF65-F5344CB8AC3E}">
-        <p14:creationId xmlns:p14="http://schemas.microsoft.com/office/powerpoint/2010/main" val="3468061972"/>
+        <p14:creationId xmlns:p14="http://schemas.microsoft.com/office/powerpoint/2010/main" val="3074226294"/>
       </p:ext>
     </p:extLst>
   </p:cSld>
@@ -339,7 +344,7 @@
       </p:grpSpPr>
       <p:sp>
         <p:nvSpPr>
-          <p:cNvPr id="2" name="Titel 1"/>
+          <p:cNvPr id="2" name="Title 1"/>
           <p:cNvSpPr>
             <a:spLocks noGrp="1"/>
           </p:cNvSpPr>
@@ -356,13 +361,13 @@
               <a:rPr lang="de-DE" smtClean="0"/>
               <a:t>Titelmasterformat durch Klicken bearbeiten</a:t>
             </a:r>
-            <a:endParaRPr lang="de-DE"/>
-          </a:p>
-        </p:txBody>
-      </p:sp>
-      <p:sp>
-        <p:nvSpPr>
-          <p:cNvPr id="3" name="Vertikaler Textplatzhalter 2"/>
+            <a:endParaRPr lang="en-US" dirty="0"/>
+          </a:p>
+        </p:txBody>
+      </p:sp>
+      <p:sp>
+        <p:nvSpPr>
+          <p:cNvPr id="3" name="Vertical Text Placeholder 2"/>
           <p:cNvSpPr>
             <a:spLocks noGrp="1"/>
           </p:cNvSpPr>
@@ -408,13 +413,13 @@
               <a:rPr lang="de-DE" smtClean="0"/>
               <a:t>Fünfte Ebene</a:t>
             </a:r>
-            <a:endParaRPr lang="de-DE"/>
-          </a:p>
-        </p:txBody>
-      </p:sp>
-      <p:sp>
-        <p:nvSpPr>
-          <p:cNvPr id="4" name="Datumsplatzhalter 3"/>
+            <a:endParaRPr lang="en-US" dirty="0"/>
+          </a:p>
+        </p:txBody>
+      </p:sp>
+      <p:sp>
+        <p:nvSpPr>
+          <p:cNvPr id="4" name="Date Placeholder 3"/>
           <p:cNvSpPr>
             <a:spLocks noGrp="1"/>
           </p:cNvSpPr>
@@ -437,7 +442,7 @@
       </p:sp>
       <p:sp>
         <p:nvSpPr>
-          <p:cNvPr id="5" name="Fußzeilenplatzhalter 4"/>
+          <p:cNvPr id="5" name="Footer Placeholder 4"/>
           <p:cNvSpPr>
             <a:spLocks noGrp="1"/>
           </p:cNvSpPr>
@@ -456,7 +461,7 @@
       </p:sp>
       <p:sp>
         <p:nvSpPr>
-          <p:cNvPr id="6" name="Foliennummernplatzhalter 5"/>
+          <p:cNvPr id="6" name="Slide Number Placeholder 5"/>
           <p:cNvSpPr>
             <a:spLocks noGrp="1"/>
           </p:cNvSpPr>
@@ -480,7 +485,7 @@
     </p:spTree>
     <p:extLst>
       <p:ext uri="{BB962C8B-B14F-4D97-AF65-F5344CB8AC3E}">
-        <p14:creationId xmlns:p14="http://schemas.microsoft.com/office/powerpoint/2010/main" val="275772197"/>
+        <p14:creationId xmlns:p14="http://schemas.microsoft.com/office/powerpoint/2010/main" val="706065813"/>
       </p:ext>
     </p:extLst>
   </p:cSld>
@@ -509,7 +514,7 @@
       </p:grpSpPr>
       <p:sp>
         <p:nvSpPr>
-          <p:cNvPr id="2" name="Vertikaler Titel 1"/>
+          <p:cNvPr id="2" name="Vertical Title 1"/>
           <p:cNvSpPr>
             <a:spLocks noGrp="1"/>
           </p:cNvSpPr>
@@ -531,13 +536,13 @@
               <a:rPr lang="de-DE" smtClean="0"/>
               <a:t>Titelmasterformat durch Klicken bearbeiten</a:t>
             </a:r>
-            <a:endParaRPr lang="de-DE"/>
-          </a:p>
-        </p:txBody>
-      </p:sp>
-      <p:sp>
-        <p:nvSpPr>
-          <p:cNvPr id="3" name="Vertikaler Textplatzhalter 2"/>
+            <a:endParaRPr lang="en-US" dirty="0"/>
+          </a:p>
+        </p:txBody>
+      </p:sp>
+      <p:sp>
+        <p:nvSpPr>
+          <p:cNvPr id="3" name="Vertical Text Placeholder 2"/>
           <p:cNvSpPr>
             <a:spLocks noGrp="1"/>
           </p:cNvSpPr>
@@ -588,13 +593,13 @@
               <a:rPr lang="de-DE" smtClean="0"/>
               <a:t>Fünfte Ebene</a:t>
             </a:r>
-            <a:endParaRPr lang="de-DE"/>
-          </a:p>
-        </p:txBody>
-      </p:sp>
-      <p:sp>
-        <p:nvSpPr>
-          <p:cNvPr id="4" name="Datumsplatzhalter 3"/>
+            <a:endParaRPr lang="en-US" dirty="0"/>
+          </a:p>
+        </p:txBody>
+      </p:sp>
+      <p:sp>
+        <p:nvSpPr>
+          <p:cNvPr id="4" name="Date Placeholder 3"/>
           <p:cNvSpPr>
             <a:spLocks noGrp="1"/>
           </p:cNvSpPr>
@@ -617,7 +622,7 @@
       </p:sp>
       <p:sp>
         <p:nvSpPr>
-          <p:cNvPr id="5" name="Fußzeilenplatzhalter 4"/>
+          <p:cNvPr id="5" name="Footer Placeholder 4"/>
           <p:cNvSpPr>
             <a:spLocks noGrp="1"/>
           </p:cNvSpPr>
@@ -636,7 +641,7 @@
       </p:sp>
       <p:sp>
         <p:nvSpPr>
-          <p:cNvPr id="6" name="Foliennummernplatzhalter 5"/>
+          <p:cNvPr id="6" name="Slide Number Placeholder 5"/>
           <p:cNvSpPr>
             <a:spLocks noGrp="1"/>
           </p:cNvSpPr>
@@ -660,7 +665,7 @@
     </p:spTree>
     <p:extLst>
       <p:ext uri="{BB962C8B-B14F-4D97-AF65-F5344CB8AC3E}">
-        <p14:creationId xmlns:p14="http://schemas.microsoft.com/office/powerpoint/2010/main" val="212231495"/>
+        <p14:creationId xmlns:p14="http://schemas.microsoft.com/office/powerpoint/2010/main" val="2771454906"/>
       </p:ext>
     </p:extLst>
   </p:cSld>
@@ -689,7 +694,7 @@
       </p:grpSpPr>
       <p:sp>
         <p:nvSpPr>
-          <p:cNvPr id="2" name="Titel 1"/>
+          <p:cNvPr id="2" name="Title 1"/>
           <p:cNvSpPr>
             <a:spLocks noGrp="1"/>
           </p:cNvSpPr>
@@ -706,13 +711,13 @@
               <a:rPr lang="de-DE" smtClean="0"/>
               <a:t>Titelmasterformat durch Klicken bearbeiten</a:t>
             </a:r>
-            <a:endParaRPr lang="de-DE"/>
-          </a:p>
-        </p:txBody>
-      </p:sp>
-      <p:sp>
-        <p:nvSpPr>
-          <p:cNvPr id="3" name="Inhaltsplatzhalter 2"/>
+            <a:endParaRPr lang="en-US" dirty="0"/>
+          </a:p>
+        </p:txBody>
+      </p:sp>
+      <p:sp>
+        <p:nvSpPr>
+          <p:cNvPr id="3" name="Content Placeholder 2"/>
           <p:cNvSpPr>
             <a:spLocks noGrp="1"/>
           </p:cNvSpPr>
@@ -758,13 +763,13 @@
               <a:rPr lang="de-DE" smtClean="0"/>
               <a:t>Fünfte Ebene</a:t>
             </a:r>
-            <a:endParaRPr lang="de-DE"/>
-          </a:p>
-        </p:txBody>
-      </p:sp>
-      <p:sp>
-        <p:nvSpPr>
-          <p:cNvPr id="4" name="Datumsplatzhalter 3"/>
+            <a:endParaRPr lang="en-US" dirty="0"/>
+          </a:p>
+        </p:txBody>
+      </p:sp>
+      <p:sp>
+        <p:nvSpPr>
+          <p:cNvPr id="4" name="Date Placeholder 3"/>
           <p:cNvSpPr>
             <a:spLocks noGrp="1"/>
           </p:cNvSpPr>
@@ -787,7 +792,7 @@
       </p:sp>
       <p:sp>
         <p:nvSpPr>
-          <p:cNvPr id="5" name="Fußzeilenplatzhalter 4"/>
+          <p:cNvPr id="5" name="Footer Placeholder 4"/>
           <p:cNvSpPr>
             <a:spLocks noGrp="1"/>
           </p:cNvSpPr>
@@ -806,7 +811,7 @@
       </p:sp>
       <p:sp>
         <p:nvSpPr>
-          <p:cNvPr id="6" name="Foliennummernplatzhalter 5"/>
+          <p:cNvPr id="6" name="Slide Number Placeholder 5"/>
           <p:cNvSpPr>
             <a:spLocks noGrp="1"/>
           </p:cNvSpPr>
@@ -830,7 +835,7 @@
     </p:spTree>
     <p:extLst>
       <p:ext uri="{BB962C8B-B14F-4D97-AF65-F5344CB8AC3E}">
-        <p14:creationId xmlns:p14="http://schemas.microsoft.com/office/powerpoint/2010/main" val="2807215819"/>
+        <p14:creationId xmlns:p14="http://schemas.microsoft.com/office/powerpoint/2010/main" val="2535900937"/>
       </p:ext>
     </p:extLst>
   </p:cSld>
@@ -859,7 +864,7 @@
       </p:grpSpPr>
       <p:sp>
         <p:nvSpPr>
-          <p:cNvPr id="2" name="Titel 1"/>
+          <p:cNvPr id="2" name="Title 1"/>
           <p:cNvSpPr>
             <a:spLocks noGrp="1"/>
           </p:cNvSpPr>
@@ -885,13 +890,13 @@
               <a:rPr lang="de-DE" smtClean="0"/>
               <a:t>Titelmasterformat durch Klicken bearbeiten</a:t>
             </a:r>
-            <a:endParaRPr lang="de-DE"/>
-          </a:p>
-        </p:txBody>
-      </p:sp>
-      <p:sp>
-        <p:nvSpPr>
-          <p:cNvPr id="3" name="Textplatzhalter 2"/>
+            <a:endParaRPr lang="en-US" dirty="0"/>
+          </a:p>
+        </p:txBody>
+      </p:sp>
+      <p:sp>
+        <p:nvSpPr>
+          <p:cNvPr id="3" name="Text Placeholder 2"/>
           <p:cNvSpPr>
             <a:spLocks noGrp="1"/>
           </p:cNvSpPr>
@@ -1010,7 +1015,7 @@
       </p:sp>
       <p:sp>
         <p:nvSpPr>
-          <p:cNvPr id="4" name="Datumsplatzhalter 3"/>
+          <p:cNvPr id="4" name="Date Placeholder 3"/>
           <p:cNvSpPr>
             <a:spLocks noGrp="1"/>
           </p:cNvSpPr>
@@ -1033,7 +1038,7 @@
       </p:sp>
       <p:sp>
         <p:nvSpPr>
-          <p:cNvPr id="5" name="Fußzeilenplatzhalter 4"/>
+          <p:cNvPr id="5" name="Footer Placeholder 4"/>
           <p:cNvSpPr>
             <a:spLocks noGrp="1"/>
           </p:cNvSpPr>
@@ -1052,7 +1057,7 @@
       </p:sp>
       <p:sp>
         <p:nvSpPr>
-          <p:cNvPr id="6" name="Foliennummernplatzhalter 5"/>
+          <p:cNvPr id="6" name="Slide Number Placeholder 5"/>
           <p:cNvSpPr>
             <a:spLocks noGrp="1"/>
           </p:cNvSpPr>
@@ -1076,7 +1081,7 @@
     </p:spTree>
     <p:extLst>
       <p:ext uri="{BB962C8B-B14F-4D97-AF65-F5344CB8AC3E}">
-        <p14:creationId xmlns:p14="http://schemas.microsoft.com/office/powerpoint/2010/main" val="3009821252"/>
+        <p14:creationId xmlns:p14="http://schemas.microsoft.com/office/powerpoint/2010/main" val="1009635099"/>
       </p:ext>
     </p:extLst>
   </p:cSld>
@@ -1105,7 +1110,7 @@
       </p:grpSpPr>
       <p:sp>
         <p:nvSpPr>
-          <p:cNvPr id="2" name="Titel 1"/>
+          <p:cNvPr id="2" name="Title 1"/>
           <p:cNvSpPr>
             <a:spLocks noGrp="1"/>
           </p:cNvSpPr>
@@ -1122,13 +1127,13 @@
               <a:rPr lang="de-DE" smtClean="0"/>
               <a:t>Titelmasterformat durch Klicken bearbeiten</a:t>
             </a:r>
-            <a:endParaRPr lang="de-DE"/>
-          </a:p>
-        </p:txBody>
-      </p:sp>
-      <p:sp>
-        <p:nvSpPr>
-          <p:cNvPr id="3" name="Inhaltsplatzhalter 2"/>
+            <a:endParaRPr lang="en-US" dirty="0"/>
+          </a:p>
+        </p:txBody>
+      </p:sp>
+      <p:sp>
+        <p:nvSpPr>
+          <p:cNvPr id="3" name="Content Placeholder 2"/>
           <p:cNvSpPr>
             <a:spLocks noGrp="1"/>
           </p:cNvSpPr>
@@ -1179,13 +1184,13 @@
               <a:rPr lang="de-DE" smtClean="0"/>
               <a:t>Fünfte Ebene</a:t>
             </a:r>
-            <a:endParaRPr lang="de-DE"/>
-          </a:p>
-        </p:txBody>
-      </p:sp>
-      <p:sp>
-        <p:nvSpPr>
-          <p:cNvPr id="4" name="Inhaltsplatzhalter 3"/>
+            <a:endParaRPr lang="en-US" dirty="0"/>
+          </a:p>
+        </p:txBody>
+      </p:sp>
+      <p:sp>
+        <p:nvSpPr>
+          <p:cNvPr id="4" name="Content Placeholder 3"/>
           <p:cNvSpPr>
             <a:spLocks noGrp="1"/>
           </p:cNvSpPr>
@@ -1236,13 +1241,13 @@
               <a:rPr lang="de-DE" smtClean="0"/>
               <a:t>Fünfte Ebene</a:t>
             </a:r>
-            <a:endParaRPr lang="de-DE"/>
-          </a:p>
-        </p:txBody>
-      </p:sp>
-      <p:sp>
-        <p:nvSpPr>
-          <p:cNvPr id="5" name="Datumsplatzhalter 4"/>
+            <a:endParaRPr lang="en-US" dirty="0"/>
+          </a:p>
+        </p:txBody>
+      </p:sp>
+      <p:sp>
+        <p:nvSpPr>
+          <p:cNvPr id="5" name="Date Placeholder 4"/>
           <p:cNvSpPr>
             <a:spLocks noGrp="1"/>
           </p:cNvSpPr>
@@ -1265,7 +1270,7 @@
       </p:sp>
       <p:sp>
         <p:nvSpPr>
-          <p:cNvPr id="6" name="Fußzeilenplatzhalter 5"/>
+          <p:cNvPr id="6" name="Footer Placeholder 5"/>
           <p:cNvSpPr>
             <a:spLocks noGrp="1"/>
           </p:cNvSpPr>
@@ -1284,7 +1289,7 @@
       </p:sp>
       <p:sp>
         <p:nvSpPr>
-          <p:cNvPr id="7" name="Foliennummernplatzhalter 6"/>
+          <p:cNvPr id="7" name="Slide Number Placeholder 6"/>
           <p:cNvSpPr>
             <a:spLocks noGrp="1"/>
           </p:cNvSpPr>
@@ -1308,7 +1313,7 @@
     </p:spTree>
     <p:extLst>
       <p:ext uri="{BB962C8B-B14F-4D97-AF65-F5344CB8AC3E}">
-        <p14:creationId xmlns:p14="http://schemas.microsoft.com/office/powerpoint/2010/main" val="1381574647"/>
+        <p14:creationId xmlns:p14="http://schemas.microsoft.com/office/powerpoint/2010/main" val="3202172434"/>
       </p:ext>
     </p:extLst>
   </p:cSld>
@@ -1337,7 +1342,7 @@
       </p:grpSpPr>
       <p:sp>
         <p:nvSpPr>
-          <p:cNvPr id="2" name="Titel 1"/>
+          <p:cNvPr id="2" name="Title 1"/>
           <p:cNvSpPr>
             <a:spLocks noGrp="1"/>
           </p:cNvSpPr>
@@ -1359,13 +1364,13 @@
               <a:rPr lang="de-DE" smtClean="0"/>
               <a:t>Titelmasterformat durch Klicken bearbeiten</a:t>
             </a:r>
-            <a:endParaRPr lang="de-DE"/>
-          </a:p>
-        </p:txBody>
-      </p:sp>
-      <p:sp>
-        <p:nvSpPr>
-          <p:cNvPr id="3" name="Textplatzhalter 2"/>
+            <a:endParaRPr lang="en-US" dirty="0"/>
+          </a:p>
+        </p:txBody>
+      </p:sp>
+      <p:sp>
+        <p:nvSpPr>
+          <p:cNvPr id="3" name="Text Placeholder 2"/>
           <p:cNvSpPr>
             <a:spLocks noGrp="1"/>
           </p:cNvSpPr>
@@ -1430,7 +1435,7 @@
       </p:sp>
       <p:sp>
         <p:nvSpPr>
-          <p:cNvPr id="4" name="Inhaltsplatzhalter 3"/>
+          <p:cNvPr id="4" name="Content Placeholder 3"/>
           <p:cNvSpPr>
             <a:spLocks noGrp="1"/>
           </p:cNvSpPr>
@@ -1481,13 +1486,13 @@
               <a:rPr lang="de-DE" smtClean="0"/>
               <a:t>Fünfte Ebene</a:t>
             </a:r>
-            <a:endParaRPr lang="de-DE"/>
-          </a:p>
-        </p:txBody>
-      </p:sp>
-      <p:sp>
-        <p:nvSpPr>
-          <p:cNvPr id="5" name="Textplatzhalter 4"/>
+            <a:endParaRPr lang="en-US" dirty="0"/>
+          </a:p>
+        </p:txBody>
+      </p:sp>
+      <p:sp>
+        <p:nvSpPr>
+          <p:cNvPr id="5" name="Text Placeholder 4"/>
           <p:cNvSpPr>
             <a:spLocks noGrp="1"/>
           </p:cNvSpPr>
@@ -1552,7 +1557,7 @@
       </p:sp>
       <p:sp>
         <p:nvSpPr>
-          <p:cNvPr id="6" name="Inhaltsplatzhalter 5"/>
+          <p:cNvPr id="6" name="Content Placeholder 5"/>
           <p:cNvSpPr>
             <a:spLocks noGrp="1"/>
           </p:cNvSpPr>
@@ -1603,13 +1608,13 @@
               <a:rPr lang="de-DE" smtClean="0"/>
               <a:t>Fünfte Ebene</a:t>
             </a:r>
-            <a:endParaRPr lang="de-DE"/>
-          </a:p>
-        </p:txBody>
-      </p:sp>
-      <p:sp>
-        <p:nvSpPr>
-          <p:cNvPr id="7" name="Datumsplatzhalter 6"/>
+            <a:endParaRPr lang="en-US" dirty="0"/>
+          </a:p>
+        </p:txBody>
+      </p:sp>
+      <p:sp>
+        <p:nvSpPr>
+          <p:cNvPr id="7" name="Date Placeholder 6"/>
           <p:cNvSpPr>
             <a:spLocks noGrp="1"/>
           </p:cNvSpPr>
@@ -1632,7 +1637,7 @@
       </p:sp>
       <p:sp>
         <p:nvSpPr>
-          <p:cNvPr id="8" name="Fußzeilenplatzhalter 7"/>
+          <p:cNvPr id="8" name="Footer Placeholder 7"/>
           <p:cNvSpPr>
             <a:spLocks noGrp="1"/>
           </p:cNvSpPr>
@@ -1651,7 +1656,7 @@
       </p:sp>
       <p:sp>
         <p:nvSpPr>
-          <p:cNvPr id="9" name="Foliennummernplatzhalter 8"/>
+          <p:cNvPr id="9" name="Slide Number Placeholder 8"/>
           <p:cNvSpPr>
             <a:spLocks noGrp="1"/>
           </p:cNvSpPr>
@@ -1675,7 +1680,7 @@
     </p:spTree>
     <p:extLst>
       <p:ext uri="{BB962C8B-B14F-4D97-AF65-F5344CB8AC3E}">
-        <p14:creationId xmlns:p14="http://schemas.microsoft.com/office/powerpoint/2010/main" val="1640451957"/>
+        <p14:creationId xmlns:p14="http://schemas.microsoft.com/office/powerpoint/2010/main" val="4098166019"/>
       </p:ext>
     </p:extLst>
   </p:cSld>
@@ -1704,7 +1709,7 @@
       </p:grpSpPr>
       <p:sp>
         <p:nvSpPr>
-          <p:cNvPr id="2" name="Titel 1"/>
+          <p:cNvPr id="2" name="Title 1"/>
           <p:cNvSpPr>
             <a:spLocks noGrp="1"/>
           </p:cNvSpPr>
@@ -1721,13 +1726,13 @@
               <a:rPr lang="de-DE" smtClean="0"/>
               <a:t>Titelmasterformat durch Klicken bearbeiten</a:t>
             </a:r>
-            <a:endParaRPr lang="de-DE"/>
-          </a:p>
-        </p:txBody>
-      </p:sp>
-      <p:sp>
-        <p:nvSpPr>
-          <p:cNvPr id="3" name="Datumsplatzhalter 2"/>
+            <a:endParaRPr lang="en-US" dirty="0"/>
+          </a:p>
+        </p:txBody>
+      </p:sp>
+      <p:sp>
+        <p:nvSpPr>
+          <p:cNvPr id="3" name="Date Placeholder 2"/>
           <p:cNvSpPr>
             <a:spLocks noGrp="1"/>
           </p:cNvSpPr>
@@ -1750,7 +1755,7 @@
       </p:sp>
       <p:sp>
         <p:nvSpPr>
-          <p:cNvPr id="4" name="Fußzeilenplatzhalter 3"/>
+          <p:cNvPr id="4" name="Footer Placeholder 3"/>
           <p:cNvSpPr>
             <a:spLocks noGrp="1"/>
           </p:cNvSpPr>
@@ -1769,7 +1774,7 @@
       </p:sp>
       <p:sp>
         <p:nvSpPr>
-          <p:cNvPr id="5" name="Foliennummernplatzhalter 4"/>
+          <p:cNvPr id="5" name="Slide Number Placeholder 4"/>
           <p:cNvSpPr>
             <a:spLocks noGrp="1"/>
           </p:cNvSpPr>
@@ -1793,7 +1798,7 @@
     </p:spTree>
     <p:extLst>
       <p:ext uri="{BB962C8B-B14F-4D97-AF65-F5344CB8AC3E}">
-        <p14:creationId xmlns:p14="http://schemas.microsoft.com/office/powerpoint/2010/main" val="3073910088"/>
+        <p14:creationId xmlns:p14="http://schemas.microsoft.com/office/powerpoint/2010/main" val="3154511130"/>
       </p:ext>
     </p:extLst>
   </p:cSld>
@@ -1822,7 +1827,7 @@
       </p:grpSpPr>
       <p:sp>
         <p:nvSpPr>
-          <p:cNvPr id="2" name="Datumsplatzhalter 1"/>
+          <p:cNvPr id="2" name="Date Placeholder 1"/>
           <p:cNvSpPr>
             <a:spLocks noGrp="1"/>
           </p:cNvSpPr>
@@ -1845,7 +1850,7 @@
       </p:sp>
       <p:sp>
         <p:nvSpPr>
-          <p:cNvPr id="3" name="Fußzeilenplatzhalter 2"/>
+          <p:cNvPr id="3" name="Footer Placeholder 2"/>
           <p:cNvSpPr>
             <a:spLocks noGrp="1"/>
           </p:cNvSpPr>
@@ -1864,7 +1869,7 @@
       </p:sp>
       <p:sp>
         <p:nvSpPr>
-          <p:cNvPr id="4" name="Foliennummernplatzhalter 3"/>
+          <p:cNvPr id="4" name="Slide Number Placeholder 3"/>
           <p:cNvSpPr>
             <a:spLocks noGrp="1"/>
           </p:cNvSpPr>
@@ -1888,7 +1893,7 @@
     </p:spTree>
     <p:extLst>
       <p:ext uri="{BB962C8B-B14F-4D97-AF65-F5344CB8AC3E}">
-        <p14:creationId xmlns:p14="http://schemas.microsoft.com/office/powerpoint/2010/main" val="2489652479"/>
+        <p14:creationId xmlns:p14="http://schemas.microsoft.com/office/powerpoint/2010/main" val="2277669300"/>
       </p:ext>
     </p:extLst>
   </p:cSld>
@@ -1917,7 +1922,7 @@
       </p:grpSpPr>
       <p:sp>
         <p:nvSpPr>
-          <p:cNvPr id="2" name="Titel 1"/>
+          <p:cNvPr id="2" name="Title 1"/>
           <p:cNvSpPr>
             <a:spLocks noGrp="1"/>
           </p:cNvSpPr>
@@ -1943,13 +1948,13 @@
               <a:rPr lang="de-DE" smtClean="0"/>
               <a:t>Titelmasterformat durch Klicken bearbeiten</a:t>
             </a:r>
-            <a:endParaRPr lang="de-DE"/>
-          </a:p>
-        </p:txBody>
-      </p:sp>
-      <p:sp>
-        <p:nvSpPr>
-          <p:cNvPr id="3" name="Inhaltsplatzhalter 2"/>
+            <a:endParaRPr lang="en-US" dirty="0"/>
+          </a:p>
+        </p:txBody>
+      </p:sp>
+      <p:sp>
+        <p:nvSpPr>
+          <p:cNvPr id="3" name="Content Placeholder 2"/>
           <p:cNvSpPr>
             <a:spLocks noGrp="1"/>
           </p:cNvSpPr>
@@ -2028,13 +2033,13 @@
               <a:rPr lang="de-DE" smtClean="0"/>
               <a:t>Fünfte Ebene</a:t>
             </a:r>
-            <a:endParaRPr lang="de-DE"/>
-          </a:p>
-        </p:txBody>
-      </p:sp>
-      <p:sp>
-        <p:nvSpPr>
-          <p:cNvPr id="4" name="Textplatzhalter 3"/>
+            <a:endParaRPr lang="en-US" dirty="0"/>
+          </a:p>
+        </p:txBody>
+      </p:sp>
+      <p:sp>
+        <p:nvSpPr>
+          <p:cNvPr id="4" name="Text Placeholder 3"/>
           <p:cNvSpPr>
             <a:spLocks noGrp="1"/>
           </p:cNvSpPr>
@@ -2099,7 +2104,7 @@
       </p:sp>
       <p:sp>
         <p:nvSpPr>
-          <p:cNvPr id="5" name="Datumsplatzhalter 4"/>
+          <p:cNvPr id="5" name="Date Placeholder 4"/>
           <p:cNvSpPr>
             <a:spLocks noGrp="1"/>
           </p:cNvSpPr>
@@ -2122,7 +2127,7 @@
       </p:sp>
       <p:sp>
         <p:nvSpPr>
-          <p:cNvPr id="6" name="Fußzeilenplatzhalter 5"/>
+          <p:cNvPr id="6" name="Footer Placeholder 5"/>
           <p:cNvSpPr>
             <a:spLocks noGrp="1"/>
           </p:cNvSpPr>
@@ -2141,7 +2146,7 @@
       </p:sp>
       <p:sp>
         <p:nvSpPr>
-          <p:cNvPr id="7" name="Foliennummernplatzhalter 6"/>
+          <p:cNvPr id="7" name="Slide Number Placeholder 6"/>
           <p:cNvSpPr>
             <a:spLocks noGrp="1"/>
           </p:cNvSpPr>
@@ -2165,7 +2170,7 @@
     </p:spTree>
     <p:extLst>
       <p:ext uri="{BB962C8B-B14F-4D97-AF65-F5344CB8AC3E}">
-        <p14:creationId xmlns:p14="http://schemas.microsoft.com/office/powerpoint/2010/main" val="2857800415"/>
+        <p14:creationId xmlns:p14="http://schemas.microsoft.com/office/powerpoint/2010/main" val="3180403695"/>
       </p:ext>
     </p:extLst>
   </p:cSld>
@@ -2194,7 +2199,7 @@
       </p:grpSpPr>
       <p:sp>
         <p:nvSpPr>
-          <p:cNvPr id="2" name="Titel 1"/>
+          <p:cNvPr id="2" name="Title 1"/>
           <p:cNvSpPr>
             <a:spLocks noGrp="1"/>
           </p:cNvSpPr>
@@ -2220,15 +2225,15 @@
               <a:rPr lang="de-DE" smtClean="0"/>
               <a:t>Titelmasterformat durch Klicken bearbeiten</a:t>
             </a:r>
-            <a:endParaRPr lang="de-DE"/>
-          </a:p>
-        </p:txBody>
-      </p:sp>
-      <p:sp>
-        <p:nvSpPr>
-          <p:cNvPr id="3" name="Bildplatzhalter 2"/>
+            <a:endParaRPr lang="en-US" dirty="0"/>
+          </a:p>
+        </p:txBody>
+      </p:sp>
+      <p:sp>
+        <p:nvSpPr>
+          <p:cNvPr id="3" name="Picture Placeholder 2"/>
           <p:cNvSpPr>
-            <a:spLocks noGrp="1"/>
+            <a:spLocks noGrp="1" noChangeAspect="1"/>
           </p:cNvSpPr>
           <p:nvPr>
             <p:ph type="pic" idx="1"/>
@@ -2241,7 +2246,7 @@
           </a:xfrm>
         </p:spPr>
         <p:txBody>
-          <a:bodyPr/>
+          <a:bodyPr anchor="t"/>
           <a:lstStyle>
             <a:lvl1pPr marL="0" indent="0">
               <a:buNone/>
@@ -2281,13 +2286,17 @@
             </a:lvl9pPr>
           </a:lstStyle>
           <a:p>
-            <a:endParaRPr lang="de-DE"/>
-          </a:p>
-        </p:txBody>
-      </p:sp>
-      <p:sp>
-        <p:nvSpPr>
-          <p:cNvPr id="4" name="Textplatzhalter 3"/>
+            <a:r>
+              <a:rPr lang="de-DE" smtClean="0"/>
+              <a:t>Bild durch Klicken auf Symbol hinzufügen</a:t>
+            </a:r>
+            <a:endParaRPr lang="en-US" dirty="0"/>
+          </a:p>
+        </p:txBody>
+      </p:sp>
+      <p:sp>
+        <p:nvSpPr>
+          <p:cNvPr id="4" name="Text Placeholder 3"/>
           <p:cNvSpPr>
             <a:spLocks noGrp="1"/>
           </p:cNvSpPr>
@@ -2352,7 +2361,7 @@
       </p:sp>
       <p:sp>
         <p:nvSpPr>
-          <p:cNvPr id="5" name="Datumsplatzhalter 4"/>
+          <p:cNvPr id="5" name="Date Placeholder 4"/>
           <p:cNvSpPr>
             <a:spLocks noGrp="1"/>
           </p:cNvSpPr>
@@ -2375,7 +2384,7 @@
       </p:sp>
       <p:sp>
         <p:nvSpPr>
-          <p:cNvPr id="6" name="Fußzeilenplatzhalter 5"/>
+          <p:cNvPr id="6" name="Footer Placeholder 5"/>
           <p:cNvSpPr>
             <a:spLocks noGrp="1"/>
           </p:cNvSpPr>
@@ -2394,7 +2403,7 @@
       </p:sp>
       <p:sp>
         <p:nvSpPr>
-          <p:cNvPr id="7" name="Foliennummernplatzhalter 6"/>
+          <p:cNvPr id="7" name="Slide Number Placeholder 6"/>
           <p:cNvSpPr>
             <a:spLocks noGrp="1"/>
           </p:cNvSpPr>
@@ -2418,7 +2427,7 @@
     </p:spTree>
     <p:extLst>
       <p:ext uri="{BB962C8B-B14F-4D97-AF65-F5344CB8AC3E}">
-        <p14:creationId xmlns:p14="http://schemas.microsoft.com/office/powerpoint/2010/main" val="107586041"/>
+        <p14:creationId xmlns:p14="http://schemas.microsoft.com/office/powerpoint/2010/main" val="1819751006"/>
       </p:ext>
     </p:extLst>
   </p:cSld>
@@ -2452,7 +2461,7 @@
       </p:grpSpPr>
       <p:sp>
         <p:nvSpPr>
-          <p:cNvPr id="2" name="Titelplatzhalter 1"/>
+          <p:cNvPr id="2" name="Title Placeholder 1"/>
           <p:cNvSpPr>
             <a:spLocks noGrp="1"/>
           </p:cNvSpPr>
@@ -2479,13 +2488,13 @@
               <a:rPr lang="de-DE" smtClean="0"/>
               <a:t>Titelmasterformat durch Klicken bearbeiten</a:t>
             </a:r>
-            <a:endParaRPr lang="de-DE"/>
-          </a:p>
-        </p:txBody>
-      </p:sp>
-      <p:sp>
-        <p:nvSpPr>
-          <p:cNvPr id="3" name="Textplatzhalter 2"/>
+            <a:endParaRPr lang="en-US" dirty="0"/>
+          </a:p>
+        </p:txBody>
+      </p:sp>
+      <p:sp>
+        <p:nvSpPr>
+          <p:cNvPr id="3" name="Text Placeholder 2"/>
           <p:cNvSpPr>
             <a:spLocks noGrp="1"/>
           </p:cNvSpPr>
@@ -2541,13 +2550,13 @@
               <a:rPr lang="de-DE" smtClean="0"/>
               <a:t>Fünfte Ebene</a:t>
             </a:r>
-            <a:endParaRPr lang="de-DE"/>
-          </a:p>
-        </p:txBody>
-      </p:sp>
-      <p:sp>
-        <p:nvSpPr>
-          <p:cNvPr id="4" name="Datumsplatzhalter 3"/>
+            <a:endParaRPr lang="en-US" dirty="0"/>
+          </a:p>
+        </p:txBody>
+      </p:sp>
+      <p:sp>
+        <p:nvSpPr>
+          <p:cNvPr id="4" name="Date Placeholder 3"/>
           <p:cNvSpPr>
             <a:spLocks noGrp="1"/>
           </p:cNvSpPr>
@@ -2588,7 +2597,7 @@
       </p:sp>
       <p:sp>
         <p:nvSpPr>
-          <p:cNvPr id="5" name="Fußzeilenplatzhalter 4"/>
+          <p:cNvPr id="5" name="Footer Placeholder 4"/>
           <p:cNvSpPr>
             <a:spLocks noGrp="1"/>
           </p:cNvSpPr>
@@ -2625,7 +2634,7 @@
       </p:sp>
       <p:sp>
         <p:nvSpPr>
-          <p:cNvPr id="6" name="Foliennummernplatzhalter 5"/>
+          <p:cNvPr id="6" name="Slide Number Placeholder 5"/>
           <p:cNvSpPr>
             <a:spLocks noGrp="1"/>
           </p:cNvSpPr>
@@ -2667,23 +2676,23 @@
     </p:spTree>
     <p:extLst>
       <p:ext uri="{BB962C8B-B14F-4D97-AF65-F5344CB8AC3E}">
-        <p14:creationId xmlns:p14="http://schemas.microsoft.com/office/powerpoint/2010/main" val="176413375"/>
+        <p14:creationId xmlns:p14="http://schemas.microsoft.com/office/powerpoint/2010/main" val="919930569"/>
       </p:ext>
     </p:extLst>
   </p:cSld>
-  <p:clrMap bg1="lt1" tx1="dk1" bg2="lt2" tx2="dk2" accent1="accent1" accent2="accent2" accent3="accent3" accent4="accent4" accent5="accent5" accent6="accent6" hlink="hlink" folHlink="folHlink"/>
+  <p:clrMap bg1="dk1" tx1="lt1" bg2="dk2" tx2="lt2" accent1="accent1" accent2="accent2" accent3="accent3" accent4="accent4" accent5="accent5" accent6="accent6" hlink="hlink" folHlink="folHlink"/>
   <p:sldLayoutIdLst>
-    <p:sldLayoutId id="2147483649" r:id="rId1"/>
-    <p:sldLayoutId id="2147483650" r:id="rId2"/>
-    <p:sldLayoutId id="2147483651" r:id="rId3"/>
-    <p:sldLayoutId id="2147483652" r:id="rId4"/>
-    <p:sldLayoutId id="2147483653" r:id="rId5"/>
-    <p:sldLayoutId id="2147483654" r:id="rId6"/>
-    <p:sldLayoutId id="2147483655" r:id="rId7"/>
-    <p:sldLayoutId id="2147483656" r:id="rId8"/>
-    <p:sldLayoutId id="2147483657" r:id="rId9"/>
-    <p:sldLayoutId id="2147483658" r:id="rId10"/>
-    <p:sldLayoutId id="2147483659" r:id="rId11"/>
+    <p:sldLayoutId id="2147483661" r:id="rId1"/>
+    <p:sldLayoutId id="2147483662" r:id="rId2"/>
+    <p:sldLayoutId id="2147483663" r:id="rId3"/>
+    <p:sldLayoutId id="2147483664" r:id="rId4"/>
+    <p:sldLayoutId id="2147483665" r:id="rId5"/>
+    <p:sldLayoutId id="2147483666" r:id="rId6"/>
+    <p:sldLayoutId id="2147483667" r:id="rId7"/>
+    <p:sldLayoutId id="2147483668" r:id="rId8"/>
+    <p:sldLayoutId id="2147483669" r:id="rId9"/>
+    <p:sldLayoutId id="2147483670" r:id="rId10"/>
+    <p:sldLayoutId id="2147483671" r:id="rId11"/>
   </p:sldLayoutIdLst>
   <p:txStyles>
     <p:titleStyle>
@@ -2871,7 +2880,7 @@
     </p:bodyStyle>
     <p:otherStyle>
       <a:defPPr>
-        <a:defRPr lang="de-DE"/>
+        <a:defRPr lang="en-US"/>
       </a:defPPr>
       <a:lvl1pPr marL="0" algn="l" defTabSz="914400" rtl="0" eaLnBrk="1" latinLnBrk="0" hangingPunct="1">
         <a:defRPr sz="1800" kern="1200">
@@ -3344,21 +3353,21 @@
         <p:spPr>
           <a:xfrm>
             <a:off x="711200" y="2768600"/>
-            <a:ext cx="2057400" cy="707886"/>
-          </a:xfrm>
-          <a:prstGeom prst="rect">
-            <a:avLst/>
-          </a:prstGeom>
-          <a:noFill/>
-        </p:spPr>
-        <p:txBody>
-          <a:bodyPr vert="horz" rtlCol="0">
-            <a:spAutoFit/>
-          </a:bodyPr>
-          <a:lstStyle/>
-          <a:p>
-            <a:r>
-              <a:rPr lang="de-DE" sz="2000" b="1" smtClean="0">
+            <a:ext cx="2235200" cy="369332"/>
+          </a:xfrm>
+          <a:prstGeom prst="rect">
+            <a:avLst/>
+          </a:prstGeom>
+          <a:noFill/>
+        </p:spPr>
+        <p:txBody>
+          <a:bodyPr vert="horz" wrap="square" rtlCol="0">
+            <a:spAutoFit/>
+          </a:bodyPr>
+          <a:lstStyle/>
+          <a:p>
+            <a:r>
+              <a:rPr lang="de-DE" b="1" dirty="0" smtClean="0">
                 <a:solidFill>
                   <a:srgbClr val="F8FAFC"/>
                 </a:solidFill>
@@ -3366,7 +3375,7 @@
               </a:rPr>
               <a:t>Ads in Commerce</a:t>
             </a:r>
-            <a:endParaRPr lang="de-DE" sz="2000" b="1">
+            <a:endParaRPr lang="de-DE" b="1" dirty="0">
               <a:solidFill>
                 <a:srgbClr val="F8FAFC"/>
               </a:solidFill>
@@ -3512,21 +3521,21 @@
         <p:spPr>
           <a:xfrm>
             <a:off x="3302000" y="2768600"/>
-            <a:ext cx="2057400" cy="400110"/>
-          </a:xfrm>
-          <a:prstGeom prst="rect">
-            <a:avLst/>
-          </a:prstGeom>
-          <a:noFill/>
-        </p:spPr>
-        <p:txBody>
-          <a:bodyPr vert="horz" rtlCol="0">
-            <a:spAutoFit/>
-          </a:bodyPr>
-          <a:lstStyle/>
-          <a:p>
-            <a:r>
-              <a:rPr lang="de-DE" sz="2000" b="1" smtClean="0">
+            <a:ext cx="2057400" cy="369332"/>
+          </a:xfrm>
+          <a:prstGeom prst="rect">
+            <a:avLst/>
+          </a:prstGeom>
+          <a:noFill/>
+        </p:spPr>
+        <p:txBody>
+          <a:bodyPr vert="horz" rtlCol="0">
+            <a:spAutoFit/>
+          </a:bodyPr>
+          <a:lstStyle/>
+          <a:p>
+            <a:r>
+              <a:rPr lang="de-DE" b="1" dirty="0" smtClean="0">
                 <a:solidFill>
                   <a:srgbClr val="F8FAFC"/>
                 </a:solidFill>
@@ -3534,7 +3543,7 @@
               </a:rPr>
               <a:t>Event Engine</a:t>
             </a:r>
-            <a:endParaRPr lang="de-DE" sz="2000" b="1">
+            <a:endParaRPr lang="de-DE" b="1" dirty="0">
               <a:solidFill>
                 <a:srgbClr val="F8FAFC"/>
               </a:solidFill>
@@ -3679,22 +3688,22 @@
         </p:nvSpPr>
         <p:spPr>
           <a:xfrm>
-            <a:off x="5892800" y="2768600"/>
-            <a:ext cx="2057400" cy="707886"/>
-          </a:xfrm>
-          <a:prstGeom prst="rect">
-            <a:avLst/>
-          </a:prstGeom>
-          <a:noFill/>
-        </p:spPr>
-        <p:txBody>
-          <a:bodyPr vert="horz" rtlCol="0">
-            <a:spAutoFit/>
-          </a:bodyPr>
-          <a:lstStyle/>
-          <a:p>
-            <a:r>
-              <a:rPr lang="de-DE" sz="2000" b="1" smtClean="0">
+            <a:off x="5892799" y="2768600"/>
+            <a:ext cx="2301289" cy="369332"/>
+          </a:xfrm>
+          <a:prstGeom prst="rect">
+            <a:avLst/>
+          </a:prstGeom>
+          <a:noFill/>
+        </p:spPr>
+        <p:txBody>
+          <a:bodyPr vert="horz" wrap="square" rtlCol="0">
+            <a:spAutoFit/>
+          </a:bodyPr>
+          <a:lstStyle/>
+          <a:p>
+            <a:r>
+              <a:rPr lang="de-DE" b="1" dirty="0" smtClean="0">
                 <a:solidFill>
                   <a:srgbClr val="F8FAFC"/>
                 </a:solidFill>
@@ -3702,7 +3711,7 @@
               </a:rPr>
               <a:t>CPM/CPC/CPL/CPA</a:t>
             </a:r>
-            <a:endParaRPr lang="de-DE" sz="2000" b="1">
+            <a:endParaRPr lang="de-DE" b="1" dirty="0">
               <a:solidFill>
                 <a:srgbClr val="F8FAFC"/>
               </a:solidFill>
@@ -3848,29 +3857,38 @@
         <p:spPr>
           <a:xfrm>
             <a:off x="8483600" y="2768600"/>
-            <a:ext cx="2057400" cy="400110"/>
-          </a:xfrm>
-          <a:prstGeom prst="rect">
-            <a:avLst/>
-          </a:prstGeom>
-          <a:noFill/>
-        </p:spPr>
-        <p:txBody>
-          <a:bodyPr vert="horz" rtlCol="0">
-            <a:spAutoFit/>
-          </a:bodyPr>
-          <a:lstStyle/>
-          <a:p>
-            <a:r>
-              <a:rPr lang="de-DE" sz="2000" b="1" smtClean="0">
+            <a:ext cx="2057400" cy="369332"/>
+          </a:xfrm>
+          <a:prstGeom prst="rect">
+            <a:avLst/>
+          </a:prstGeom>
+          <a:noFill/>
+        </p:spPr>
+        <p:txBody>
+          <a:bodyPr vert="horz" rtlCol="0">
+            <a:spAutoFit/>
+          </a:bodyPr>
+          <a:lstStyle/>
+          <a:p>
+            <a:r>
+              <a:rPr lang="de-DE" b="1" dirty="0" err="1" smtClean="0">
                 <a:solidFill>
                   <a:srgbClr val="F8FAFC"/>
                 </a:solidFill>
                 <a:latin typeface="Aptos Display"/>
               </a:rPr>
-              <a:t>Consent-first</a:t>
-            </a:r>
-            <a:endParaRPr lang="de-DE" sz="2000" b="1">
+              <a:t>Consent</a:t>
+            </a:r>
+            <a:r>
+              <a:rPr lang="de-DE" b="1" dirty="0" smtClean="0">
+                <a:solidFill>
+                  <a:srgbClr val="F8FAFC"/>
+                </a:solidFill>
+                <a:latin typeface="Aptos Display"/>
+              </a:rPr>
+              <a:t>-first</a:t>
+            </a:r>
+            <a:endParaRPr lang="de-DE" b="1" dirty="0">
               <a:solidFill>
                 <a:srgbClr val="F8FAFC"/>
               </a:solidFill>
@@ -3902,7 +3920,7 @@
           <a:lstStyle/>
           <a:p>
             <a:r>
-              <a:rPr lang="de-DE" sz="850" smtClean="0">
+              <a:rPr lang="de-DE" sz="850" dirty="0" smtClean="0">
                 <a:solidFill>
                   <a:srgbClr val="BECDE6"/>
                 </a:solidFill>
@@ -3910,7 +3928,7 @@
               </a:rPr>
               <a:t>Personalisierung und Messung nur mit Einwilligung</a:t>
             </a:r>
-            <a:endParaRPr lang="de-DE" sz="850">
+            <a:endParaRPr lang="de-DE" sz="850" dirty="0">
               <a:solidFill>
                 <a:srgbClr val="BECDE6"/>
               </a:solidFill>
@@ -31482,7 +31500,7 @@
 </file>
 
 <file path=ppt/theme/theme1.xml><?xml version="1.0" encoding="utf-8"?>
-<a:theme xmlns:a="http://schemas.openxmlformats.org/drawingml/2006/main" name="Office">
+<a:theme xmlns:a="http://schemas.openxmlformats.org/drawingml/2006/main" name="Office Theme">
   <a:themeElements>
     <a:clrScheme name="Office">
       <a:dk1>
@@ -31736,7 +31754,7 @@
   <a:extraClrSchemeLst/>
   <a:extLst>
     <a:ext uri="{05A4C25C-085E-4340-85A3-A5531E510DB2}">
-      <thm15:themeFamily xmlns:thm15="http://schemas.microsoft.com/office/thememl/2012/main" name="Office Theme" id="{62F939B6-93AF-4DB8-9C6B-D6C7DFDC589F}" vid="{4A3C46E8-61CC-4603-A589-7422A47A8E4A}"/>
+      <thm15:themeFamily xmlns:thm15="http://schemas.microsoft.com/office/thememl/2012/main" name="Office Theme" id="{62F939B6-93AF-4DB8-9C6B-D6C7DFDC589F}" vid="{4F46216B-77A9-411A-B9D3-5023FCB70208}"/>
     </a:ext>
   </a:extLst>
 </a:theme>
